--- a/artifacts/speaking-portfolio-expanded/decks/product-engineering-30min-screen.pptx
+++ b/artifacts/speaking-portfolio-expanded/decks/product-engineering-30min-screen.pptx
@@ -19,6 +19,7 @@
     <p:sldId id="264" r:id="rIdSlide9"/>
     <p:sldId id="265" r:id="rIdSlide10"/>
     <p:sldId id="266" r:id="rIdSlide11"/>
+    <p:sldId id="267" r:id="rIdSlide12"/>
   </p:sldIdLst>
   <p:sldSz cx="13716000" cy="8572500" type="custom"/>
   <p:notesSz cx="6858000" cy="9144000"/>
@@ -676,7 +677,7 @@
                 <a:ea typeface="Arial"/>
                 <a:cs typeface="Arial"/>
               </a:rPr>
-              <a:t xml:space="preserve">Source slide 12. 22:00 to 25:00</a:t>
+              <a:t xml:space="preserve">Source slide 12. 21:00 to 23:30</a:t>
             </a:r>
             <a:endParaRPr lang="en-US" sz="1200"/>
           </a:p>
@@ -906,145 +907,145 @@
                 <a:ea typeface="Arial"/>
                 <a:cs typeface="Arial"/>
               </a:rPr>
-              <a:t xml:space="preserve">Then add the two missing from the old list. Sending a message to a real customer. Deleting their records. Those are consequences for another person, even when the API call costs a fraction of a cent. A person approves them. The system must enforce that permission, not merely mention it in the prompt.</a:t>
-            </a:r>
-            <a:endParaRPr lang="en-US" sz="1200"/>
-          </a:p>
-          <a:p>
-            <a:pPr marL="0" indent="0">
-              <a:lnSpc>
-                <a:spcPts val="1560"/>
-              </a:lnSpc>
-              <a:spcAft>
-                <a:spcPts val="0"/>
-              </a:spcAft>
-              <a:buNone/>
-            </a:pPr>
-            <a:r>
-              <a:rPr lang="en-US" sz="1200" b="0">
-                <a:solidFill>
-                  <a:srgbClr val="202b33"/>
-                </a:solidFill>
-                <a:latin typeface="Arial"/>
-                <a:ea typeface="Arial"/>
-                <a:cs typeface="Arial"/>
-              </a:rPr>
-              <a:t xml:space="preserve"/>
-            </a:r>
-            <a:endParaRPr lang="en-US" sz="1200"/>
-          </a:p>
-          <a:p>
-            <a:pPr marL="0" indent="0">
-              <a:lnSpc>
-                <a:spcPts val="1560"/>
-              </a:lnSpc>
-              <a:spcAft>
-                <a:spcPts val="0"/>
-              </a:spcAft>
-              <a:buNone/>
-            </a:pPr>
-            <a:r>
-              <a:rPr lang="en-US" sz="1200" b="0">
-                <a:solidFill>
-                  <a:srgbClr val="202b33"/>
-                </a:solidFill>
-                <a:latin typeface="Arial"/>
-                <a:ea typeface="Arial"/>
-                <a:cs typeface="Arial"/>
-              </a:rPr>
-              <a:t xml:space="preserve"/>
-            </a:r>
-            <a:endParaRPr lang="en-US" sz="1200"/>
-          </a:p>
-          <a:p>
-            <a:pPr marL="0" indent="0">
-              <a:lnSpc>
-                <a:spcPts val="1560"/>
-              </a:lnSpc>
-              <a:spcAft>
-                <a:spcPts val="0"/>
-              </a:spcAft>
-              <a:buNone/>
-            </a:pPr>
-            <a:r>
-              <a:rPr lang="en-US" sz="1200" b="0">
-                <a:solidFill>
-                  <a:srgbClr val="202b33"/>
-                </a:solidFill>
-                <a:latin typeface="Arial"/>
-                <a:ea typeface="Arial"/>
-                <a:cs typeface="Arial"/>
-              </a:rPr>
-              <a:t xml:space="preserve"/>
-            </a:r>
-            <a:endParaRPr lang="en-US" sz="1200"/>
-          </a:p>
-          <a:p>
-            <a:pPr marL="0" indent="0">
-              <a:lnSpc>
-                <a:spcPts val="1560"/>
-              </a:lnSpc>
-              <a:spcAft>
-                <a:spcPts val="0"/>
-              </a:spcAft>
-              <a:buNone/>
-            </a:pPr>
-            <a:r>
-              <a:rPr lang="en-US" sz="1200" b="0">
-                <a:solidFill>
-                  <a:srgbClr val="202b33"/>
-                </a:solidFill>
-                <a:latin typeface="Arial"/>
-                <a:ea typeface="Arial"/>
-                <a:cs typeface="Arial"/>
-              </a:rPr>
-              <a:t xml:space="preserve"/>
-            </a:r>
-            <a:endParaRPr lang="en-US" sz="1200"/>
-          </a:p>
-          <a:p>
-            <a:pPr marL="0" indent="0">
-              <a:lnSpc>
-                <a:spcPts val="1560"/>
-              </a:lnSpc>
-              <a:spcAft>
-                <a:spcPts val="0"/>
-              </a:spcAft>
-              <a:buNone/>
-            </a:pPr>
-            <a:r>
-              <a:rPr lang="en-US" sz="1200" b="0">
-                <a:solidFill>
-                  <a:srgbClr val="202b33"/>
-                </a:solidFill>
-                <a:latin typeface="Arial"/>
-                <a:ea typeface="Arial"/>
-                <a:cs typeface="Arial"/>
-              </a:rPr>
-              <a:t xml:space="preserve"/>
-            </a:r>
-            <a:endParaRPr lang="en-US" sz="1200"/>
-          </a:p>
-          <a:p>
-            <a:pPr marL="0" indent="0">
-              <a:lnSpc>
-                <a:spcPts val="1560"/>
-              </a:lnSpc>
-              <a:spcAft>
-                <a:spcPts val="0"/>
-              </a:spcAft>
-              <a:buNone/>
-            </a:pPr>
-            <a:r>
-              <a:rPr lang="en-US" sz="1200" b="0">
-                <a:solidFill>
-                  <a:srgbClr val="202b33"/>
-                </a:solidFill>
-                <a:latin typeface="Arial"/>
-                <a:ea typeface="Arial"/>
-                <a:cs typeface="Arial"/>
-              </a:rPr>
-              <a:t xml:space="preserve">Bridge: Graicunas counted 222 possible relationships at six reports; this is a warning about interfaces, not a staffing ratio. Bainbridge asks who still gets recovery practice. Every experiment needs a hypothesis and a report.</a:t>
+              <a:t xml:space="preserve">Then add the two missing from the old list. Sending a message to a real customer. Deleting their records. Those are consequences for another person, even when the API call costs a fraction of a cent. A person approves them, and the system enforces that permission rather than mentioning it in a prompt.</a:t>
+            </a:r>
+            <a:endParaRPr lang="en-US" sz="1200"/>
+          </a:p>
+          <a:p>
+            <a:pPr marL="0" indent="0">
+              <a:lnSpc>
+                <a:spcPts val="1560"/>
+              </a:lnSpc>
+              <a:spcAft>
+                <a:spcPts val="0"/>
+              </a:spcAft>
+              <a:buNone/>
+            </a:pPr>
+            <a:r>
+              <a:rPr lang="en-US" sz="1200" b="0">
+                <a:solidFill>
+                  <a:srgbClr val="202b33"/>
+                </a:solidFill>
+                <a:latin typeface="Arial"/>
+                <a:ea typeface="Arial"/>
+                <a:cs typeface="Arial"/>
+              </a:rPr>
+              <a:t xml:space="preserve"/>
+            </a:r>
+            <a:endParaRPr lang="en-US" sz="1200"/>
+          </a:p>
+          <a:p>
+            <a:pPr marL="0" indent="0">
+              <a:lnSpc>
+                <a:spcPts val="1560"/>
+              </a:lnSpc>
+              <a:spcAft>
+                <a:spcPts val="0"/>
+              </a:spcAft>
+              <a:buNone/>
+            </a:pPr>
+            <a:r>
+              <a:rPr lang="en-US" sz="1200" b="0">
+                <a:solidFill>
+                  <a:srgbClr val="202b33"/>
+                </a:solidFill>
+                <a:latin typeface="Arial"/>
+                <a:ea typeface="Arial"/>
+                <a:cs typeface="Arial"/>
+              </a:rPr>
+              <a:t xml:space="preserve"/>
+            </a:r>
+            <a:endParaRPr lang="en-US" sz="1200"/>
+          </a:p>
+          <a:p>
+            <a:pPr marL="0" indent="0">
+              <a:lnSpc>
+                <a:spcPts val="1560"/>
+              </a:lnSpc>
+              <a:spcAft>
+                <a:spcPts val="0"/>
+              </a:spcAft>
+              <a:buNone/>
+            </a:pPr>
+            <a:r>
+              <a:rPr lang="en-US" sz="1200" b="0">
+                <a:solidFill>
+                  <a:srgbClr val="202b33"/>
+                </a:solidFill>
+                <a:latin typeface="Arial"/>
+                <a:ea typeface="Arial"/>
+                <a:cs typeface="Arial"/>
+              </a:rPr>
+              <a:t xml:space="preserve"/>
+            </a:r>
+            <a:endParaRPr lang="en-US" sz="1200"/>
+          </a:p>
+          <a:p>
+            <a:pPr marL="0" indent="0">
+              <a:lnSpc>
+                <a:spcPts val="1560"/>
+              </a:lnSpc>
+              <a:spcAft>
+                <a:spcPts val="0"/>
+              </a:spcAft>
+              <a:buNone/>
+            </a:pPr>
+            <a:r>
+              <a:rPr lang="en-US" sz="1200" b="0">
+                <a:solidFill>
+                  <a:srgbClr val="202b33"/>
+                </a:solidFill>
+                <a:latin typeface="Arial"/>
+                <a:ea typeface="Arial"/>
+                <a:cs typeface="Arial"/>
+              </a:rPr>
+              <a:t xml:space="preserve"/>
+            </a:r>
+            <a:endParaRPr lang="en-US" sz="1200"/>
+          </a:p>
+          <a:p>
+            <a:pPr marL="0" indent="0">
+              <a:lnSpc>
+                <a:spcPts val="1560"/>
+              </a:lnSpc>
+              <a:spcAft>
+                <a:spcPts val="0"/>
+              </a:spcAft>
+              <a:buNone/>
+            </a:pPr>
+            <a:r>
+              <a:rPr lang="en-US" sz="1200" b="0">
+                <a:solidFill>
+                  <a:srgbClr val="202b33"/>
+                </a:solidFill>
+                <a:latin typeface="Arial"/>
+                <a:ea typeface="Arial"/>
+                <a:cs typeface="Arial"/>
+              </a:rPr>
+              <a:t xml:space="preserve"/>
+            </a:r>
+            <a:endParaRPr lang="en-US" sz="1200"/>
+          </a:p>
+          <a:p>
+            <a:pPr marL="0" indent="0">
+              <a:lnSpc>
+                <a:spcPts val="1560"/>
+              </a:lnSpc>
+              <a:spcAft>
+                <a:spcPts val="0"/>
+              </a:spcAft>
+              <a:buNone/>
+            </a:pPr>
+            <a:r>
+              <a:rPr lang="en-US" sz="1200" b="0">
+                <a:solidFill>
+                  <a:srgbClr val="202b33"/>
+                </a:solidFill>
+                <a:latin typeface="Arial"/>
+                <a:ea typeface="Arial"/>
+                <a:cs typeface="Arial"/>
+              </a:rPr>
+              <a:t xml:space="preserve">Bridge: Graicunas counted 222 possible relationships at six reports, which is a warning about interfaces rather than a staffing ratio, and Bainbridge asks who still gets recovery practice. One more ownership line for the years ahead: tokens stop being a build cost and become fuel, defensive agents run forever, and somebody owns that meter.</a:t>
             </a:r>
             <a:endParaRPr lang="en-US" sz="1200"/>
           </a:p>
@@ -1157,7 +1158,626 @@
                 <a:ea typeface="Arial"/>
                 <a:cs typeface="Arial"/>
               </a:rPr>
-              <a:t xml:space="preserve">Source slide 15. 25:00 to 30:00</a:t>
+              <a:t xml:space="preserve">Source slide 15. 23:30 to 26:30</a:t>
+            </a:r>
+            <a:endParaRPr lang="en-US" sz="1200"/>
+          </a:p>
+          <a:p>
+            <a:pPr marL="0" indent="0">
+              <a:lnSpc>
+                <a:spcPts val="1560"/>
+              </a:lnSpc>
+              <a:spcAft>
+                <a:spcPts val="0"/>
+              </a:spcAft>
+              <a:buNone/>
+            </a:pPr>
+            <a:r>
+              <a:rPr lang="en-US" sz="1200" b="0">
+                <a:solidFill>
+                  <a:srgbClr val="202b33"/>
+                </a:solidFill>
+                <a:latin typeface="Arial"/>
+                <a:ea typeface="Arial"/>
+                <a:cs typeface="Arial"/>
+              </a:rPr>
+              <a:t xml:space="preserve"/>
+            </a:r>
+            <a:endParaRPr lang="en-US" sz="1200"/>
+          </a:p>
+          <a:p>
+            <a:pPr marL="0" indent="0">
+              <a:lnSpc>
+                <a:spcPts val="1560"/>
+              </a:lnSpc>
+              <a:spcAft>
+                <a:spcPts val="0"/>
+              </a:spcAft>
+              <a:buNone/>
+            </a:pPr>
+            <a:r>
+              <a:rPr lang="en-US" sz="1200" b="0">
+                <a:solidFill>
+                  <a:srgbClr val="202b33"/>
+                </a:solidFill>
+                <a:latin typeface="Arial"/>
+                <a:ea typeface="Arial"/>
+                <a:cs typeface="Arial"/>
+              </a:rPr>
+              <a:t xml:space="preserve">Generated UI, adapting in real time, per person</a:t>
+            </a:r>
+            <a:endParaRPr lang="en-US" sz="1200"/>
+          </a:p>
+          <a:p>
+            <a:pPr marL="0" indent="0">
+              <a:lnSpc>
+                <a:spcPts val="1560"/>
+              </a:lnSpc>
+              <a:spcAft>
+                <a:spcPts val="0"/>
+              </a:spcAft>
+              <a:buNone/>
+            </a:pPr>
+            <a:r>
+              <a:rPr lang="en-US" sz="1200" b="0">
+                <a:solidFill>
+                  <a:srgbClr val="202b33"/>
+                </a:solidFill>
+                <a:latin typeface="Arial"/>
+                <a:ea typeface="Arial"/>
+                <a:cs typeface="Arial"/>
+              </a:rPr>
+              <a:t xml:space="preserve"/>
+            </a:r>
+            <a:endParaRPr lang="en-US" sz="1200"/>
+          </a:p>
+          <a:p>
+            <a:pPr marL="0" indent="0">
+              <a:lnSpc>
+                <a:spcPts val="1560"/>
+              </a:lnSpc>
+              <a:spcAft>
+                <a:spcPts val="0"/>
+              </a:spcAft>
+              <a:buNone/>
+            </a:pPr>
+            <a:r>
+              <a:rPr lang="en-US" sz="1200" b="0">
+                <a:solidFill>
+                  <a:srgbClr val="202b33"/>
+                </a:solidFill>
+                <a:latin typeface="Arial"/>
+                <a:ea typeface="Arial"/>
+                <a:cs typeface="Arial"/>
+              </a:rPr>
+              <a:t xml:space="preserve">Yes, the software you mastered is going away. As you know it.</a:t>
+            </a:r>
+            <a:endParaRPr lang="en-US" sz="1200"/>
+          </a:p>
+          <a:p>
+            <a:pPr marL="0" indent="0">
+              <a:lnSpc>
+                <a:spcPts val="1560"/>
+              </a:lnSpc>
+              <a:spcAft>
+                <a:spcPts val="0"/>
+              </a:spcAft>
+              <a:buNone/>
+            </a:pPr>
+            <a:r>
+              <a:rPr lang="en-US" sz="1200" b="0">
+                <a:solidFill>
+                  <a:srgbClr val="202b33"/>
+                </a:solidFill>
+                <a:latin typeface="Arial"/>
+                <a:ea typeface="Arial"/>
+                <a:cs typeface="Arial"/>
+              </a:rPr>
+              <a:t xml:space="preserve"/>
+            </a:r>
+            <a:endParaRPr lang="en-US" sz="1200"/>
+          </a:p>
+          <a:p>
+            <a:pPr marL="0" indent="0">
+              <a:lnSpc>
+                <a:spcPts val="1560"/>
+              </a:lnSpc>
+              <a:spcAft>
+                <a:spcPts val="0"/>
+              </a:spcAft>
+              <a:buNone/>
+            </a:pPr>
+            <a:r>
+              <a:rPr lang="en-US" sz="1200" b="0">
+                <a:solidFill>
+                  <a:srgbClr val="202b33"/>
+                </a:solidFill>
+                <a:latin typeface="Arial"/>
+                <a:ea typeface="Arial"/>
+                <a:cs typeface="Arial"/>
+              </a:rPr>
+              <a:t xml:space="preserve">The channel is not spoken for.</a:t>
+            </a:r>
+            <a:endParaRPr lang="en-US" sz="1200"/>
+          </a:p>
+          <a:p>
+            <a:pPr marL="0" indent="0">
+              <a:lnSpc>
+                <a:spcPts val="1560"/>
+              </a:lnSpc>
+              <a:spcAft>
+                <a:spcPts val="0"/>
+              </a:spcAft>
+              <a:buNone/>
+            </a:pPr>
+            <a:r>
+              <a:rPr lang="en-US" sz="1200" b="0">
+                <a:solidFill>
+                  <a:srgbClr val="202b33"/>
+                </a:solidFill>
+                <a:latin typeface="Arial"/>
+                <a:ea typeface="Arial"/>
+                <a:cs typeface="Arial"/>
+              </a:rPr>
+              <a:t xml:space="preserve"/>
+            </a:r>
+            <a:endParaRPr lang="en-US" sz="1200"/>
+          </a:p>
+          <a:p>
+            <a:pPr marL="0" indent="0">
+              <a:lnSpc>
+                <a:spcPts val="1560"/>
+              </a:lnSpc>
+              <a:spcAft>
+                <a:spcPts val="0"/>
+              </a:spcAft>
+              <a:buNone/>
+            </a:pPr>
+            <a:r>
+              <a:rPr lang="en-US" sz="1200" b="0">
+                <a:solidFill>
+                  <a:srgbClr val="202b33"/>
+                </a:solidFill>
+                <a:latin typeface="Arial"/>
+                <a:ea typeface="Arial"/>
+                <a:cs typeface="Arial"/>
+              </a:rPr>
+              <a:t xml:space="preserve">Second prediction, and this one is less comfortable. AI does not magically make software work. Well-understood software still gets harder to operate as the world moves under it: you outgrow a performance envelope, you accumulate features, somebody deprecates your dependency. Generation makes the first version cheap. It does not make the tenth year cheap.</a:t>
+            </a:r>
+            <a:endParaRPr lang="en-US" sz="1200"/>
+          </a:p>
+          <a:p>
+            <a:pPr marL="0" indent="0">
+              <a:lnSpc>
+                <a:spcPts val="1560"/>
+              </a:lnSpc>
+              <a:spcAft>
+                <a:spcPts val="0"/>
+              </a:spcAft>
+              <a:buNone/>
+            </a:pPr>
+            <a:r>
+              <a:rPr lang="en-US" sz="1200" b="0">
+                <a:solidFill>
+                  <a:srgbClr val="202b33"/>
+                </a:solidFill>
+                <a:latin typeface="Arial"/>
+                <a:ea typeface="Arial"/>
+                <a:cs typeface="Arial"/>
+              </a:rPr>
+              <a:t xml:space="preserve"/>
+            </a:r>
+            <a:endParaRPr lang="en-US" sz="1200"/>
+          </a:p>
+          <a:p>
+            <a:pPr marL="0" indent="0">
+              <a:lnSpc>
+                <a:spcPts val="1560"/>
+              </a:lnSpc>
+              <a:spcAft>
+                <a:spcPts val="0"/>
+              </a:spcAft>
+              <a:buNone/>
+            </a:pPr>
+            <a:r>
+              <a:rPr lang="en-US" sz="1200" b="0">
+                <a:solidFill>
+                  <a:srgbClr val="202b33"/>
+                </a:solidFill>
+                <a:latin typeface="Arial"/>
+                <a:ea typeface="Arial"/>
+                <a:cs typeface="Arial"/>
+              </a:rPr>
+              <a:t xml:space="preserve">And throwaway software is a taste most of this room has and most of the world does not. We are early adopters; we are delighted to regenerate a tool rather than maintain it. Normal people are not turned on by the idea of vibe coding their own recipe tracker, never mind a Slack replacement. What they will accept is an interface generated for them, adapting in real time, that they never had to choose from a menu of products.</a:t>
+            </a:r>
+            <a:endParaRPr lang="en-US" sz="1200"/>
+          </a:p>
+          <a:p>
+            <a:pPr marL="0" indent="0">
+              <a:lnSpc>
+                <a:spcPts val="1560"/>
+              </a:lnSpc>
+              <a:spcAft>
+                <a:spcPts val="0"/>
+              </a:spcAft>
+              <a:buNone/>
+            </a:pPr>
+            <a:r>
+              <a:rPr lang="en-US" sz="1200" b="0">
+                <a:solidFill>
+                  <a:srgbClr val="202b33"/>
+                </a:solidFill>
+                <a:latin typeface="Arial"/>
+                <a:ea typeface="Arial"/>
+                <a:cs typeface="Arial"/>
+              </a:rPr>
+              <a:t xml:space="preserve"/>
+            </a:r>
+            <a:endParaRPr lang="en-US" sz="1200"/>
+          </a:p>
+          <a:p>
+            <a:pPr marL="0" indent="0">
+              <a:lnSpc>
+                <a:spcPts val="1560"/>
+              </a:lnSpc>
+              <a:spcAft>
+                <a:spcPts val="0"/>
+              </a:spcAft>
+              <a:buNone/>
+            </a:pPr>
+            <a:r>
+              <a:rPr lang="en-US" sz="1200" b="0">
+                <a:solidFill>
+                  <a:srgbClr val="202b33"/>
+                </a:solidFill>
+                <a:latin typeface="Arial"/>
+                <a:ea typeface="Arial"/>
+                <a:cs typeface="Arial"/>
+              </a:rPr>
+              <a:t xml:space="preserve">Which raises the question this room should actually be arguing about. Should OpenAI and Anthropic end up owning every software channel? Watch what happens when the assistants ship real-time collaboration: who spends less time in email, Slack and Google Docs then? I can already make and edit images and video in ways that make me less likely to open Photoshop or DaVinci. If I need a jingle for the company, I ask Suno and it is done. So is everything you spent a lifetime learning, mastering and fighting with about to be irrelevant? Yes. At least as you know it.</a:t>
+            </a:r>
+            <a:endParaRPr lang="en-US" sz="1200"/>
+          </a:p>
+          <a:p>
+            <a:pPr marL="0" indent="0">
+              <a:lnSpc>
+                <a:spcPts val="1560"/>
+              </a:lnSpc>
+              <a:spcAft>
+                <a:spcPts val="0"/>
+              </a:spcAft>
+              <a:buNone/>
+            </a:pPr>
+            <a:r>
+              <a:rPr lang="en-US" sz="1200" b="0">
+                <a:solidFill>
+                  <a:srgbClr val="202b33"/>
+                </a:solidFill>
+                <a:latin typeface="Arial"/>
+                <a:ea typeface="Arial"/>
+                <a:cs typeface="Arial"/>
+              </a:rPr>
+              <a:t xml:space="preserve"/>
+            </a:r>
+            <a:endParaRPr lang="en-US" sz="1200"/>
+          </a:p>
+          <a:p>
+            <a:pPr marL="0" indent="0">
+              <a:lnSpc>
+                <a:spcPts val="1560"/>
+              </a:lnSpc>
+              <a:spcAft>
+                <a:spcPts val="0"/>
+              </a:spcAft>
+              <a:buNone/>
+            </a:pPr>
+            <a:r>
+              <a:rPr lang="en-US" sz="1200" b="0">
+                <a:solidFill>
+                  <a:srgbClr val="202b33"/>
+                </a:solidFill>
+                <a:latin typeface="Arial"/>
+                <a:ea typeface="Arial"/>
+                <a:cs typeface="Arial"/>
+              </a:rPr>
+              <a:t xml:space="preserve">What replaces it looks less like a grid of apps and more like Minority Report, with a surprise revival of the terminal. Which is a Matrix ending when you think about it. Thanks, AI. Skynet is not so bad if I get to keep my CLIs.</a:t>
+            </a:r>
+            <a:endParaRPr lang="en-US" sz="1200"/>
+          </a:p>
+          <a:p>
+            <a:pPr marL="0" indent="0">
+              <a:lnSpc>
+                <a:spcPts val="1560"/>
+              </a:lnSpc>
+              <a:spcAft>
+                <a:spcPts val="0"/>
+              </a:spcAft>
+              <a:buNone/>
+            </a:pPr>
+            <a:r>
+              <a:rPr lang="en-US" sz="1200" b="0">
+                <a:solidFill>
+                  <a:srgbClr val="202b33"/>
+                </a:solidFill>
+                <a:latin typeface="Arial"/>
+                <a:ea typeface="Arial"/>
+                <a:cs typeface="Arial"/>
+              </a:rPr>
+              <a:t xml:space="preserve"/>
+            </a:r>
+            <a:endParaRPr lang="en-US" sz="1200"/>
+          </a:p>
+          <a:p>
+            <a:pPr marL="0" indent="0">
+              <a:lnSpc>
+                <a:spcPts val="1560"/>
+              </a:lnSpc>
+              <a:spcAft>
+                <a:spcPts val="0"/>
+              </a:spcAft>
+              <a:buNone/>
+            </a:pPr>
+            <a:r>
+              <a:rPr lang="en-US" sz="1200" b="0">
+                <a:solidFill>
+                  <a:srgbClr val="202b33"/>
+                </a:solidFill>
+                <a:latin typeface="Arial"/>
+                <a:ea typeface="Arial"/>
+                <a:cs typeface="Arial"/>
+              </a:rPr>
+              <a:t xml:space="preserve">Here is the part I want you to leave with. That future is not spoken for. GPT image being pretty good does not mean the story of image creation belongs to the big players, and the same is true in whichever industry you work in. Those of us who do not work at a frontier lab, the organic agents in the room, get to rethink any and every app as an AI-native system from the boundary up. That is this whole talk one level higher: do not photocopy today's product categories onto tomorrow's substrate either.</a:t>
+            </a:r>
+            <a:endParaRPr lang="en-US" sz="1200"/>
+          </a:p>
+          <a:p>
+            <a:pPr marL="0" indent="0">
+              <a:lnSpc>
+                <a:spcPts val="1560"/>
+              </a:lnSpc>
+              <a:spcAft>
+                <a:spcPts val="0"/>
+              </a:spcAft>
+              <a:buNone/>
+            </a:pPr>
+            <a:r>
+              <a:rPr lang="en-US" sz="1200" b="0">
+                <a:solidFill>
+                  <a:srgbClr val="202b33"/>
+                </a:solidFill>
+                <a:latin typeface="Arial"/>
+                <a:ea typeface="Arial"/>
+                <a:cs typeface="Arial"/>
+              </a:rPr>
+              <a:t xml:space="preserve"/>
+            </a:r>
+            <a:endParaRPr lang="en-US" sz="1200"/>
+          </a:p>
+          <a:p>
+            <a:pPr marL="0" indent="0">
+              <a:lnSpc>
+                <a:spcPts val="1560"/>
+              </a:lnSpc>
+              <a:spcAft>
+                <a:spcPts val="0"/>
+              </a:spcAft>
+              <a:buNone/>
+            </a:pPr>
+            <a:r>
+              <a:rPr lang="en-US" sz="1200" b="0">
+                <a:solidFill>
+                  <a:srgbClr val="202b33"/>
+                </a:solidFill>
+                <a:latin typeface="Arial"/>
+                <a:ea typeface="Arial"/>
+                <a:cs typeface="Arial"/>
+              </a:rPr>
+              <a:t xml:space="preserve"/>
+            </a:r>
+            <a:endParaRPr lang="en-US" sz="1200"/>
+          </a:p>
+          <a:p>
+            <a:pPr marL="0" indent="0">
+              <a:lnSpc>
+                <a:spcPts val="1560"/>
+              </a:lnSpc>
+              <a:spcAft>
+                <a:spcPts val="0"/>
+              </a:spcAft>
+              <a:buNone/>
+            </a:pPr>
+            <a:r>
+              <a:rPr lang="en-US" sz="1200" b="0">
+                <a:solidFill>
+                  <a:srgbClr val="202b33"/>
+                </a:solidFill>
+                <a:latin typeface="Arial"/>
+                <a:ea typeface="Arial"/>
+                <a:cs typeface="Arial"/>
+              </a:rPr>
+              <a:t xml:space="preserve"/>
+            </a:r>
+            <a:endParaRPr lang="en-US" sz="1200"/>
+          </a:p>
+          <a:p>
+            <a:pPr marL="0" indent="0">
+              <a:lnSpc>
+                <a:spcPts val="1560"/>
+              </a:lnSpc>
+              <a:spcAft>
+                <a:spcPts val="0"/>
+              </a:spcAft>
+              <a:buNone/>
+            </a:pPr>
+            <a:r>
+              <a:rPr lang="en-US" sz="1200" b="0">
+                <a:solidFill>
+                  <a:srgbClr val="202b33"/>
+                </a:solidFill>
+                <a:latin typeface="Arial"/>
+                <a:ea typeface="Arial"/>
+                <a:cs typeface="Arial"/>
+              </a:rPr>
+              <a:t xml:space="preserve">Ask which product they use daily that would not survive somebody else rebuilding it AI-native. Take one answer. Do not resolve it.</a:t>
+            </a:r>
+            <a:endParaRPr lang="en-US" sz="1200"/>
+          </a:p>
+          <a:p>
+            <a:pPr marL="0" indent="0">
+              <a:lnSpc>
+                <a:spcPts val="1560"/>
+              </a:lnSpc>
+              <a:spcAft>
+                <a:spcPts val="0"/>
+              </a:spcAft>
+              <a:buNone/>
+            </a:pPr>
+            <a:r>
+              <a:rPr lang="en-US" sz="1200" b="0">
+                <a:solidFill>
+                  <a:srgbClr val="202b33"/>
+                </a:solidFill>
+                <a:latin typeface="Arial"/>
+                <a:ea typeface="Arial"/>
+                <a:cs typeface="Arial"/>
+              </a:rPr>
+              <a:t xml:space="preserve"/>
+            </a:r>
+            <a:endParaRPr lang="en-US" sz="1200"/>
+          </a:p>
+          <a:p>
+            <a:pPr marL="0" indent="0">
+              <a:lnSpc>
+                <a:spcPts val="1560"/>
+              </a:lnSpc>
+              <a:spcAft>
+                <a:spcPts val="0"/>
+              </a:spcAft>
+              <a:buNone/>
+            </a:pPr>
+            <a:r>
+              <a:rPr lang="en-US" sz="1200" b="0">
+                <a:solidFill>
+                  <a:srgbClr val="202b33"/>
+                </a:solidFill>
+                <a:latin typeface="Arial"/>
+                <a:ea typeface="Arial"/>
+                <a:cs typeface="Arial"/>
+              </a:rPr>
+              <a:t xml:space="preserve"/>
+            </a:r>
+            <a:endParaRPr lang="en-US" sz="1200"/>
+          </a:p>
+        </p:txBody>
+      </p:sp>
+    </p:spTree>
+  </p:cSld>
+  <p:clrMapOvr>
+    <a:masterClrMapping/>
+  </p:clrMapOvr>
+</p:notes>
+</file>
+
+<file path=ppt/notesSlides/notesSlide12.xml><?xml version="1.0" encoding="utf-8"?>
+<p:notes xmlns:a="http://schemas.openxmlformats.org/drawingml/2006/main" xmlns:r="http://schemas.openxmlformats.org/officeDocument/2006/relationships" xmlns:p="http://schemas.openxmlformats.org/presentationml/2006/main">
+  <p:cSld>
+    <p:spTree>
+      <p:nvGrpSpPr>
+        <p:cNvPr id="1" name=""/>
+        <p:cNvGrpSpPr/>
+        <p:nvPr/>
+      </p:nvGrpSpPr>
+      <p:grpSpPr>
+        <a:xfrm>
+          <a:off x="0" y="0"/>
+          <a:ext cx="0" cy="0"/>
+          <a:chOff x="0" y="0"/>
+          <a:chExt cx="0" cy="0"/>
+        </a:xfrm>
+      </p:grpSpPr>
+      <p:sp>
+        <p:nvSpPr>
+          <p:cNvPr id="2" name="Presenter notes"/>
+          <p:cNvSpPr txBox="1"/>
+          <p:nvPr>
+            <p:ph type="body" idx="1"/>
+          </p:nvPr>
+        </p:nvSpPr>
+        <p:spPr>
+          <a:xfrm>
+            <a:off x="457200" y="1428750"/>
+            <a:ext cx="5715000" cy="6667500"/>
+          </a:xfrm>
+        </p:spPr>
+        <p:txBody>
+          <a:bodyPr/>
+          <a:lstStyle/>
+          <a:p>
+            <a:pPr marL="0" indent="0">
+              <a:lnSpc>
+                <a:spcPts val="1560"/>
+              </a:lnSpc>
+              <a:spcAft>
+                <a:spcPts val="0"/>
+              </a:spcAft>
+              <a:buNone/>
+            </a:pPr>
+            <a:r>
+              <a:rPr lang="en-US" sz="1200" b="0">
+                <a:solidFill>
+                  <a:srgbClr val="202b33"/>
+                </a:solidFill>
+                <a:latin typeface="Arial"/>
+                <a:ea typeface="Arial"/>
+                <a:cs typeface="Arial"/>
+              </a:rPr>
+              <a:t xml:space="preserve">The Future of Product Engineering: Break the Mirror on Purpose</a:t>
+            </a:r>
+            <a:endParaRPr lang="en-US" sz="1200"/>
+          </a:p>
+          <a:p>
+            <a:pPr marL="0" indent="0">
+              <a:lnSpc>
+                <a:spcPts val="1560"/>
+              </a:lnSpc>
+              <a:spcAft>
+                <a:spcPts val="0"/>
+              </a:spcAft>
+              <a:buNone/>
+            </a:pPr>
+            <a:r>
+              <a:rPr lang="en-US" sz="1200" b="0">
+                <a:solidFill>
+                  <a:srgbClr val="202b33"/>
+                </a:solidFill>
+                <a:latin typeface="Arial"/>
+                <a:ea typeface="Arial"/>
+                <a:cs typeface="Arial"/>
+              </a:rPr>
+              <a:t xml:space="preserve"/>
+            </a:r>
+            <a:endParaRPr lang="en-US" sz="1200"/>
+          </a:p>
+          <a:p>
+            <a:pPr marL="0" indent="0">
+              <a:lnSpc>
+                <a:spcPts val="1560"/>
+              </a:lnSpc>
+              <a:spcAft>
+                <a:spcPts val="0"/>
+              </a:spcAft>
+              <a:buNone/>
+            </a:pPr>
+            <a:r>
+              <a:rPr lang="en-US" sz="1200" b="0">
+                <a:solidFill>
+                  <a:srgbClr val="202b33"/>
+                </a:solidFill>
+                <a:latin typeface="Arial"/>
+                <a:ea typeface="Arial"/>
+                <a:cs typeface="Arial"/>
+              </a:rPr>
+              <a:t xml:space="preserve">Source slide 17. 26:30 to 30:00</a:t>
             </a:r>
             <a:endParaRPr lang="en-US" sz="1200"/>
           </a:p>
@@ -1341,99 +1961,99 @@
                 <a:ea typeface="Arial"/>
                 <a:cs typeface="Arial"/>
               </a:rPr>
-              <a:t xml:space="preserve">Take one boundary. What arrives, what leaves, who decides, and what did it cost last week? Make collection cheaper without erasing the disagreement that the handoff used to expose. Keep the product review where the evidence conflicts. Give the resulting decision a durable artifact so the next agent does not have to guess.</a:t>
-            </a:r>
-            <a:endParaRPr lang="en-US" sz="1200"/>
-          </a:p>
-          <a:p>
-            <a:pPr marL="0" indent="0">
-              <a:lnSpc>
-                <a:spcPts val="1560"/>
-              </a:lnSpc>
-              <a:spcAft>
-                <a:spcPts val="0"/>
-              </a:spcAft>
-              <a:buNone/>
-            </a:pPr>
-            <a:r>
-              <a:rPr lang="en-US" sz="1200" b="0">
-                <a:solidFill>
-                  <a:srgbClr val="202b33"/>
-                </a:solidFill>
-                <a:latin typeface="Arial"/>
-                <a:ea typeface="Arial"/>
-                <a:cs typeface="Arial"/>
-              </a:rPr>
-              <a:t xml:space="preserve"/>
-            </a:r>
-            <a:endParaRPr lang="en-US" sz="1200"/>
-          </a:p>
-          <a:p>
-            <a:pPr marL="0" indent="0">
-              <a:lnSpc>
-                <a:spcPts val="1560"/>
-              </a:lnSpc>
-              <a:spcAft>
-                <a:spcPts val="0"/>
-              </a:spcAft>
-              <a:buNone/>
-            </a:pPr>
-            <a:r>
-              <a:rPr lang="en-US" sz="1200" b="0">
-                <a:solidFill>
-                  <a:srgbClr val="202b33"/>
-                </a:solidFill>
-                <a:latin typeface="Arial"/>
-                <a:ea typeface="Arial"/>
-                <a:cs typeface="Arial"/>
-              </a:rPr>
-              <a:t xml:space="preserve">Then price ownership. Six agents do not become free because one person has their names in a config file. Reserve the person's attention and practise the exceptional work. Put permission before customer consequences.</a:t>
-            </a:r>
-            <a:endParaRPr lang="en-US" sz="1200"/>
-          </a:p>
-          <a:p>
-            <a:pPr marL="0" indent="0">
-              <a:lnSpc>
-                <a:spcPts val="1560"/>
-              </a:lnSpc>
-              <a:spcAft>
-                <a:spcPts val="0"/>
-              </a:spcAft>
-              <a:buNone/>
-            </a:pPr>
-            <a:r>
-              <a:rPr lang="en-US" sz="1200" b="0">
-                <a:solidFill>
-                  <a:srgbClr val="202b33"/>
-                </a:solidFill>
-                <a:latin typeface="Arial"/>
-                <a:ea typeface="Arial"/>
-                <a:cs typeface="Arial"/>
-              </a:rPr>
-              <a:t xml:space="preserve"/>
-            </a:r>
-            <a:endParaRPr lang="en-US" sz="1200"/>
-          </a:p>
-          <a:p>
-            <a:pPr marL="0" indent="0">
-              <a:lnSpc>
-                <a:spcPts val="1560"/>
-              </a:lnSpc>
-              <a:spcAft>
-                <a:spcPts val="0"/>
-              </a:spcAft>
-              <a:buNone/>
-            </a:pPr>
-            <a:r>
-              <a:rPr lang="en-US" sz="1200" b="0">
-                <a:solidFill>
-                  <a:srgbClr val="202b33"/>
-                </a:solidFill>
-                <a:latin typeface="Arial"/>
-                <a:ea typeface="Arial"/>
-                <a:cs typeface="Arial"/>
-              </a:rPr>
-              <a:t xml:space="preserve">The org chart is a record of earlier tradeoffs. You are allowed to make new ones. Automate the right things. Keep the taste.</a:t>
+              <a:t xml:space="preserve">Take one boundary. What arrives, what leaves, who decides, and what did it cost last week? Make collection cheaper without erasing the disagreement the handoff used to expose. Keep the product review where the evidence conflicts, and give the decision a durable artifact so the next agent does not have to guess.</a:t>
+            </a:r>
+            <a:endParaRPr lang="en-US" sz="1200"/>
+          </a:p>
+          <a:p>
+            <a:pPr marL="0" indent="0">
+              <a:lnSpc>
+                <a:spcPts val="1560"/>
+              </a:lnSpc>
+              <a:spcAft>
+                <a:spcPts val="0"/>
+              </a:spcAft>
+              <a:buNone/>
+            </a:pPr>
+            <a:r>
+              <a:rPr lang="en-US" sz="1200" b="0">
+                <a:solidFill>
+                  <a:srgbClr val="202b33"/>
+                </a:solidFill>
+                <a:latin typeface="Arial"/>
+                <a:ea typeface="Arial"/>
+                <a:cs typeface="Arial"/>
+              </a:rPr>
+              <a:t xml:space="preserve"/>
+            </a:r>
+            <a:endParaRPr lang="en-US" sz="1200"/>
+          </a:p>
+          <a:p>
+            <a:pPr marL="0" indent="0">
+              <a:lnSpc>
+                <a:spcPts val="1560"/>
+              </a:lnSpc>
+              <a:spcAft>
+                <a:spcPts val="0"/>
+              </a:spcAft>
+              <a:buNone/>
+            </a:pPr>
+            <a:r>
+              <a:rPr lang="en-US" sz="1200" b="0">
+                <a:solidFill>
+                  <a:srgbClr val="202b33"/>
+                </a:solidFill>
+                <a:latin typeface="Arial"/>
+                <a:ea typeface="Arial"/>
+                <a:cs typeface="Arial"/>
+              </a:rPr>
+              <a:t xml:space="preserve">Then price ownership, and price the fuel. Six agents do not become free because one person has their names in a config file, and neither does the burn that keeps them running. Put permission before customer consequences.</a:t>
+            </a:r>
+            <a:endParaRPr lang="en-US" sz="1200"/>
+          </a:p>
+          <a:p>
+            <a:pPr marL="0" indent="0">
+              <a:lnSpc>
+                <a:spcPts val="1560"/>
+              </a:lnSpc>
+              <a:spcAft>
+                <a:spcPts val="0"/>
+              </a:spcAft>
+              <a:buNone/>
+            </a:pPr>
+            <a:r>
+              <a:rPr lang="en-US" sz="1200" b="0">
+                <a:solidFill>
+                  <a:srgbClr val="202b33"/>
+                </a:solidFill>
+                <a:latin typeface="Arial"/>
+                <a:ea typeface="Arial"/>
+                <a:cs typeface="Arial"/>
+              </a:rPr>
+              <a:t xml:space="preserve"/>
+            </a:r>
+            <a:endParaRPr lang="en-US" sz="1200"/>
+          </a:p>
+          <a:p>
+            <a:pPr marL="0" indent="0">
+              <a:lnSpc>
+                <a:spcPts val="1560"/>
+              </a:lnSpc>
+              <a:spcAft>
+                <a:spcPts val="0"/>
+              </a:spcAft>
+              <a:buNone/>
+            </a:pPr>
+            <a:r>
+              <a:rPr lang="en-US" sz="1200" b="0">
+                <a:solidFill>
+                  <a:srgbClr val="202b33"/>
+                </a:solidFill>
+                <a:latin typeface="Arial"/>
+                <a:ea typeface="Arial"/>
+                <a:cs typeface="Arial"/>
+              </a:rPr>
+              <a:t xml:space="preserve">And then do the larger version of the same move. The org chart is a record of earlier tradeoffs; so is the product category you are working inside. You are allowed to make new ones, and the channel is not spoken for yet. Break the mirror on purpose. Automate the right things. Keep the taste.</a:t>
             </a:r>
             <a:endParaRPr lang="en-US" sz="1200"/>
           </a:p>
@@ -2533,7 +3153,7 @@
                 <a:ea typeface="Arial"/>
                 <a:cs typeface="Arial"/>
               </a:rPr>
-              <a:t xml:space="preserve">Take 30 seconds: where is your team on the spectrum, and what is its heaviest handoff? Keep the answers for slide 14.</a:t>
+              <a:t xml:space="preserve">Take 30 seconds: where is your team on the spectrum, and what is its heaviest handoff? Keep the answers for the close.</a:t>
             </a:r>
             <a:endParaRPr lang="en-US" sz="1200"/>
           </a:p>
@@ -3265,7 +3885,7 @@
                 <a:ea typeface="Arial"/>
                 <a:cs typeface="Arial"/>
               </a:rPr>
-              <a:t xml:space="preserve">Source slide 6. 09:00 to 11:30</a:t>
+              <a:t xml:space="preserve">Source slide 6. 09:00 to 11:00</a:t>
             </a:r>
             <a:endParaRPr lang="en-US" sz="1200"/>
           </a:p>
@@ -3495,7 +4115,7 @@
                 <a:ea typeface="Arial"/>
                 <a:cs typeface="Arial"/>
               </a:rPr>
-              <a:t xml:space="preserve">Keep the review where somebody opens the source material and argues about what belongs at the top. It is the integrating interface in this system. Taste gets exercised in public there. A standing brief is useful; a dashboard nobody opens is just another place to store the mistake.</a:t>
+              <a:t xml:space="preserve">Keep the review where somebody opens the source material and argues about what belongs at the top. It is the integrating interface in this system. Taste gets exercised in public there.</a:t>
             </a:r>
             <a:endParaRPr lang="en-US" sz="1200"/>
           </a:p>
@@ -3746,7 +4366,7 @@
                 <a:ea typeface="Arial"/>
                 <a:cs typeface="Arial"/>
               </a:rPr>
-              <a:t xml:space="preserve">Source slide 7. 11:30 to 13:00</a:t>
+              <a:t xml:space="preserve">Source slide 7. 11:00 to 12:30</a:t>
             </a:r>
             <a:endParaRPr lang="en-US" sz="1200"/>
           </a:p>
@@ -3930,52 +4550,6 @@
                 <a:ea typeface="Arial"/>
                 <a:cs typeface="Arial"/>
               </a:rPr>
-              <a:t xml:space="preserve">Who estimated a ticket last week? Keep your hands up long enough to count. That is this room, not an industry survey. If half the room did it yesterday, then effort has left some rubrics and is alive in others.</a:t>
-            </a:r>
-            <a:endParaRPr lang="en-US" sz="1200"/>
-          </a:p>
-          <a:p>
-            <a:pPr marL="0" indent="0">
-              <a:lnSpc>
-                <a:spcPts val="1560"/>
-              </a:lnSpc>
-              <a:spcAft>
-                <a:spcPts val="0"/>
-              </a:spcAft>
-              <a:buNone/>
-            </a:pPr>
-            <a:r>
-              <a:rPr lang="en-US" sz="1200" b="0">
-                <a:solidFill>
-                  <a:srgbClr val="202b33"/>
-                </a:solidFill>
-                <a:latin typeface="Arial"/>
-                <a:ea typeface="Arial"/>
-                <a:cs typeface="Arial"/>
-              </a:rPr>
-              <a:t xml:space="preserve"/>
-            </a:r>
-            <a:endParaRPr lang="en-US" sz="1200"/>
-          </a:p>
-          <a:p>
-            <a:pPr marL="0" indent="0">
-              <a:lnSpc>
-                <a:spcPts val="1560"/>
-              </a:lnSpc>
-              <a:spcAft>
-                <a:spcPts val="0"/>
-              </a:spcAft>
-              <a:buNone/>
-            </a:pPr>
-            <a:r>
-              <a:rPr lang="en-US" sz="1200" b="0">
-                <a:solidFill>
-                  <a:srgbClr val="202b33"/>
-                </a:solidFill>
-                <a:latin typeface="Arial"/>
-                <a:ea typeface="Arial"/>
-                <a:cs typeface="Arial"/>
-              </a:rPr>
               <a:t xml:space="preserve">We still have to choose what to ship. Even when the first implementation is cheap, rollout, review, customer support, and maintenance have costs. Put those beside evidence for the idea. Do not replace story points with a model's confidence and call that prioritization.</a:t>
             </a:r>
             <a:endParaRPr lang="en-US" sz="1200"/>
@@ -4068,7 +4642,7 @@
                 <a:ea typeface="Arial"/>
                 <a:cs typeface="Arial"/>
               </a:rPr>
-              <a:t xml:space="preserve">Count the hands and say the count without inventing a denominator. Confirm the first-person observation with Dan before delivery; if it no longer holds, start with the audience question.</a:t>
+              <a:t xml:space="preserve">Ask who estimated a ticket last week, take the show of hands, and say the count without inventing a denominator. Confirm the first-person observation with Dan before delivery; if it no longer holds, open with the question instead.</a:t>
             </a:r>
             <a:endParaRPr lang="en-US" sz="1200"/>
           </a:p>
@@ -4227,7 +4801,7 @@
                 <a:ea typeface="Arial"/>
                 <a:cs typeface="Arial"/>
               </a:rPr>
-              <a:t xml:space="preserve">Source slide 9. 13:00 to 15:00</a:t>
+              <a:t xml:space="preserve">Source slide 9. 12:30 to 14:30</a:t>
             </a:r>
             <a:endParaRPr lang="en-US" sz="1200"/>
           </a:p>
@@ -4411,7 +4985,7 @@
                 <a:ea typeface="Arial"/>
                 <a:cs typeface="Arial"/>
               </a:rPr>
-              <a:t xml:space="preserve">The invitation explains what changes, that it is a beta, and how to turn it off. A person approves the message and recipients. Acceptance enrolls the customer behind a flag. Narrow feedback tells us what to try next; it does not automatically establish a causal improvement.</a:t>
+              <a:t xml:space="preserve">The invitation explains what changes, that it is a beta, and how to turn it off. A person approves the message and the recipients. Narrow feedback tells us what to try next; it does not establish a causal improvement.</a:t>
             </a:r>
             <a:endParaRPr lang="en-US" sz="1200"/>
           </a:p>
@@ -4708,7 +5282,7 @@
                 <a:ea typeface="Arial"/>
                 <a:cs typeface="Arial"/>
               </a:rPr>
-              <a:t xml:space="preserve">Source slide 10. 15:00 to 17:00</a:t>
+              <a:t xml:space="preserve">Source slide 10. 14:30 to 16:30</a:t>
             </a:r>
             <a:endParaRPr lang="en-US" sz="1200"/>
           </a:p>
@@ -5235,7 +5809,7 @@
                 <a:ea typeface="Arial"/>
                 <a:cs typeface="Arial"/>
               </a:rPr>
-              <a:t xml:space="preserve">Source slide 11. 17:00 to 22:00</a:t>
+              <a:t xml:space="preserve">Source slide 11. 16:30 to 21:00</a:t>
             </a:r>
             <a:endParaRPr lang="en-US" sz="1200"/>
           </a:p>
@@ -5649,7 +6223,7 @@
                 <a:ea typeface="Arial"/>
                 <a:cs typeface="Arial"/>
               </a:rPr>
-              <a:t xml:space="preserve">Five minutes in the 40/30 routes, 3:30 in the 15. Begin with only this slide, never the answer-labelled kit. After the vote open the kit and map B to Pressure copy, C to Clearer first step. Follow economics-product/demo.md. Allow 45 seconds to write the rule.</a:t>
+              <a:t xml:space="preserve">Four and a half minutes in the 40/30 routes, 3:30 in the 15. Begin with only this slide, never the answer-labelled kit. After the vote open the kit and map B to Pressure copy, C to Clearer first step. Follow economics-product/demo.md. Allow 45 seconds to write the rule.</a:t>
             </a:r>
             <a:endParaRPr lang="en-US" sz="1200"/>
           </a:p>
@@ -6304,7 +6878,7 @@
                 <a:ea typeface="Arial"/>
                 <a:cs typeface="Arial"/>
               </a:rPr>
-              <a:t xml:space="preserve">10 / 11    SOURCE SLIDE 12</a:t>
+              <a:t xml:space="preserve">10 / 12    SOURCE SLIDE 12</a:t>
             </a:r>
             <a:endParaRPr lang="en-US" sz="1350"/>
           </a:p>
@@ -6752,7 +7326,7 @@
                 <a:ea typeface="Arial"/>
                 <a:cs typeface="Arial"/>
               </a:rPr>
-              <a:t xml:space="preserve">11 / 11    SOURCE SLIDE 15</a:t>
+              <a:t xml:space="preserve">11 / 12    SOURCE SLIDE 15</a:t>
             </a:r>
             <a:endParaRPr lang="en-US" sz="1350"/>
           </a:p>
@@ -6801,7 +7375,7 @@
                 <a:ea typeface="Arial"/>
                 <a:cs typeface="Arial"/>
               </a:rPr>
-              <a:t xml:space="preserve">Break the mirror on purpose</a:t>
+              <a:t xml:space="preserve">Minority Report, With Terminals</a:t>
             </a:r>
             <a:endParaRPr lang="en-US" sz="3900"/>
           </a:p>
@@ -6899,7 +7473,7 @@
                 <a:ea typeface="Arial"/>
                 <a:cs typeface="Arial"/>
               </a:rPr>
-              <a:t xml:space="preserve">Reprice the handoffs. Draw the interfaces.</a:t>
+              <a:t xml:space="preserve">Generated UI, adapting in real time, per person</a:t>
             </a:r>
             <a:endParaRPr lang="en-US" sz="3150"/>
           </a:p>
@@ -6963,6 +7537,552 @@
         <p:spPr>
           <a:xfrm>
             <a:off x="2000250" y="3558540"/>
+            <a:ext cx="11029950" cy="1059180"/>
+          </a:xfrm>
+          <a:prstGeom prst="rect">
+            <a:avLst/>
+          </a:prstGeom>
+          <a:noFill/>
+          <a:ln>
+            <a:noFill/>
+          </a:ln>
+        </p:spPr>
+        <p:txBody>
+          <a:bodyPr wrap="none" lIns="0" tIns="0" rIns="0" bIns="0" anchor="t">
+            <a:noAutofit/>
+          </a:bodyPr>
+          <a:lstStyle/>
+          <a:p>
+            <a:pPr marL="0" indent="0">
+              <a:lnSpc>
+                <a:spcPts val="4095"/>
+              </a:lnSpc>
+              <a:spcAft>
+                <a:spcPts val="0"/>
+              </a:spcAft>
+              <a:buNone/>
+            </a:pPr>
+            <a:r>
+              <a:rPr lang="en-US" sz="3150" b="0">
+                <a:solidFill>
+                  <a:srgbClr val="F5F1E9"/>
+                </a:solidFill>
+                <a:latin typeface="Arial"/>
+                <a:ea typeface="Arial"/>
+                <a:cs typeface="Arial"/>
+              </a:rPr>
+              <a:t xml:space="preserve">Yes, the software you mastered is going away. As you</a:t>
+            </a:r>
+            <a:endParaRPr lang="en-US" sz="3150"/>
+          </a:p>
+          <a:p>
+            <a:pPr marL="0" indent="0">
+              <a:lnSpc>
+                <a:spcPts val="4095"/>
+              </a:lnSpc>
+              <a:spcAft>
+                <a:spcPts val="0"/>
+              </a:spcAft>
+              <a:buNone/>
+            </a:pPr>
+            <a:r>
+              <a:rPr lang="en-US" sz="3150" b="0">
+                <a:solidFill>
+                  <a:srgbClr val="F5F1E9"/>
+                </a:solidFill>
+                <a:latin typeface="Arial"/>
+                <a:ea typeface="Arial"/>
+                <a:cs typeface="Arial"/>
+              </a:rPr>
+              <a:t xml:space="preserve">know it.</a:t>
+            </a:r>
+            <a:endParaRPr lang="en-US" sz="3150"/>
+          </a:p>
+        </p:txBody>
+      </p:sp>
+      <p:sp>
+        <p:nvSpPr>
+          <p:cNvPr id="8" name="Text 8"/>
+          <p:cNvSpPr txBox="1"/>
+          <p:nvPr/>
+        </p:nvSpPr>
+        <p:spPr>
+          <a:xfrm>
+            <a:off x="685800" y="4865370"/>
+            <a:ext cx="904875" cy="476250"/>
+          </a:xfrm>
+          <a:prstGeom prst="rect">
+            <a:avLst/>
+          </a:prstGeom>
+          <a:noFill/>
+          <a:ln>
+            <a:noFill/>
+          </a:ln>
+        </p:spPr>
+        <p:txBody>
+          <a:bodyPr wrap="none" lIns="0" tIns="0" rIns="0" bIns="0" anchor="t">
+            <a:noAutofit/>
+          </a:bodyPr>
+          <a:lstStyle/>
+          <a:p>
+            <a:pPr marL="0" indent="0">
+              <a:lnSpc>
+                <a:spcPts val="2438"/>
+              </a:lnSpc>
+              <a:spcAft>
+                <a:spcPts val="0"/>
+              </a:spcAft>
+              <a:buNone/>
+            </a:pPr>
+            <a:r>
+              <a:rPr lang="en-US" sz="1875" b="0">
+                <a:solidFill>
+                  <a:srgbClr val="EFB45F"/>
+                </a:solidFill>
+                <a:latin typeface="Arial"/>
+                <a:ea typeface="Arial"/>
+                <a:cs typeface="Arial"/>
+              </a:rPr>
+              <a:t xml:space="preserve">03</a:t>
+            </a:r>
+            <a:endParaRPr lang="en-US" sz="1875"/>
+          </a:p>
+        </p:txBody>
+      </p:sp>
+      <p:sp>
+        <p:nvSpPr>
+          <p:cNvPr id="9" name="Text 9"/>
+          <p:cNvSpPr txBox="1"/>
+          <p:nvPr/>
+        </p:nvSpPr>
+        <p:spPr>
+          <a:xfrm>
+            <a:off x="2000250" y="4865370"/>
+            <a:ext cx="11029950" cy="539115"/>
+          </a:xfrm>
+          <a:prstGeom prst="rect">
+            <a:avLst/>
+          </a:prstGeom>
+          <a:noFill/>
+          <a:ln>
+            <a:noFill/>
+          </a:ln>
+        </p:spPr>
+        <p:txBody>
+          <a:bodyPr wrap="none" lIns="0" tIns="0" rIns="0" bIns="0" anchor="t">
+            <a:noAutofit/>
+          </a:bodyPr>
+          <a:lstStyle/>
+          <a:p>
+            <a:pPr marL="0" indent="0">
+              <a:lnSpc>
+                <a:spcPts val="4095"/>
+              </a:lnSpc>
+              <a:spcAft>
+                <a:spcPts val="0"/>
+              </a:spcAft>
+              <a:buNone/>
+            </a:pPr>
+            <a:r>
+              <a:rPr lang="en-US" sz="3150" b="0">
+                <a:solidFill>
+                  <a:srgbClr val="F5F1E9"/>
+                </a:solidFill>
+                <a:latin typeface="Arial"/>
+                <a:ea typeface="Arial"/>
+                <a:cs typeface="Arial"/>
+              </a:rPr>
+              <a:t xml:space="preserve">The channel is not spoken for.</a:t>
+            </a:r>
+            <a:endParaRPr lang="en-US" sz="3150"/>
+          </a:p>
+        </p:txBody>
+      </p:sp>
+      <p:sp>
+        <p:nvSpPr>
+          <p:cNvPr id="10" name="Text 10"/>
+          <p:cNvSpPr txBox="1"/>
+          <p:nvPr/>
+        </p:nvSpPr>
+        <p:spPr>
+          <a:xfrm>
+            <a:off x="457200" y="8286750"/>
+            <a:ext cx="12477750" cy="190500"/>
+          </a:xfrm>
+          <a:prstGeom prst="rect">
+            <a:avLst/>
+          </a:prstGeom>
+          <a:noFill/>
+          <a:ln>
+            <a:noFill/>
+          </a:ln>
+        </p:spPr>
+        <p:txBody>
+          <a:bodyPr wrap="none" lIns="0" tIns="0" rIns="0" bIns="0" anchor="t">
+            <a:noAutofit/>
+          </a:bodyPr>
+          <a:lstStyle/>
+          <a:p>
+            <a:pPr marL="0" indent="0">
+              <a:lnSpc>
+                <a:spcPts val="1268"/>
+              </a:lnSpc>
+              <a:spcAft>
+                <a:spcPts val="0"/>
+              </a:spcAft>
+              <a:buNone/>
+            </a:pPr>
+            <a:r>
+              <a:rPr lang="en-US" sz="975" b="0">
+                <a:solidFill>
+                  <a:srgbClr val="BEC9C6"/>
+                </a:solidFill>
+                <a:latin typeface="Arial"/>
+                <a:ea typeface="Arial"/>
+                <a:cs typeface="Arial"/>
+              </a:rPr>
+              <a:t xml:space="preserve">The Future of Product Engineering: Break the Mirror on Purpose</a:t>
+            </a:r>
+            <a:endParaRPr lang="en-US" sz="975"/>
+          </a:p>
+        </p:txBody>
+      </p:sp>
+      <p:sp>
+        <p:nvSpPr>
+          <p:cNvPr id="11" name="Text 11"/>
+          <p:cNvSpPr txBox="1"/>
+          <p:nvPr/>
+        </p:nvSpPr>
+        <p:spPr>
+          <a:xfrm>
+            <a:off x="13049250" y="8286750"/>
+            <a:ext cx="238125" cy="190500"/>
+          </a:xfrm>
+          <a:prstGeom prst="rect">
+            <a:avLst/>
+          </a:prstGeom>
+          <a:noFill/>
+          <a:ln>
+            <a:noFill/>
+          </a:ln>
+        </p:spPr>
+        <p:txBody>
+          <a:bodyPr wrap="none" lIns="0" tIns="0" rIns="0" bIns="0" anchor="t">
+            <a:noAutofit/>
+          </a:bodyPr>
+          <a:lstStyle/>
+          <a:p>
+            <a:pPr marL="0" indent="0">
+              <a:lnSpc>
+                <a:spcPts val="1268"/>
+              </a:lnSpc>
+              <a:spcAft>
+                <a:spcPts val="0"/>
+              </a:spcAft>
+              <a:buNone/>
+            </a:pPr>
+            <a:r>
+              <a:rPr lang="en-US" sz="975" b="0">
+                <a:solidFill>
+                  <a:srgbClr val="BEC9C6"/>
+                </a:solidFill>
+                <a:latin typeface="Arial"/>
+                <a:ea typeface="Arial"/>
+                <a:cs typeface="Arial"/>
+              </a:rPr>
+              <a:t xml:space="preserve">11</a:t>
+            </a:r>
+            <a:endParaRPr lang="en-US" sz="975"/>
+          </a:p>
+        </p:txBody>
+      </p:sp>
+    </p:spTree>
+  </p:cSld>
+  <p:clrMapOvr>
+    <a:masterClrMapping/>
+  </p:clrMapOvr>
+</p:sld>
+</file>
+
+<file path=ppt/slides/slide12.xml><?xml version="1.0" encoding="utf-8"?>
+<p:sld xmlns:a="http://schemas.openxmlformats.org/drawingml/2006/main" xmlns:r="http://schemas.openxmlformats.org/officeDocument/2006/relationships" xmlns:p="http://schemas.openxmlformats.org/presentationml/2006/main">
+  <p:cSld name="Slide 12">
+    <p:bg>
+      <p:bgPr>
+        <a:solidFill>
+          <a:srgbClr val="161D26"/>
+        </a:solidFill>
+        <a:effectLst/>
+      </p:bgPr>
+    </p:bg>
+    <p:spTree>
+      <p:nvGrpSpPr>
+        <p:cNvPr id="1" name=""/>
+        <p:cNvGrpSpPr/>
+        <p:nvPr/>
+      </p:nvGrpSpPr>
+      <p:grpSpPr>
+        <a:xfrm>
+          <a:off x="0" y="0"/>
+          <a:ext cx="0" cy="0"/>
+          <a:chOff x="0" y="0"/>
+          <a:chExt cx="0" cy="0"/>
+        </a:xfrm>
+      </p:grpSpPr>
+      <p:sp>
+        <p:nvSpPr>
+          <p:cNvPr id="2" name="Text 2"/>
+          <p:cNvSpPr txBox="1"/>
+          <p:nvPr/>
+        </p:nvSpPr>
+        <p:spPr>
+          <a:xfrm>
+            <a:off x="685800" y="381000"/>
+            <a:ext cx="12344400" cy="457200"/>
+          </a:xfrm>
+          <a:prstGeom prst="rect">
+            <a:avLst/>
+          </a:prstGeom>
+          <a:noFill/>
+          <a:ln>
+            <a:noFill/>
+          </a:ln>
+        </p:spPr>
+        <p:txBody>
+          <a:bodyPr wrap="none" lIns="0" tIns="0" rIns="0" bIns="0" anchor="t">
+            <a:noAutofit/>
+          </a:bodyPr>
+          <a:lstStyle/>
+          <a:p>
+            <a:pPr marL="0" indent="0">
+              <a:lnSpc>
+                <a:spcPts val="1755"/>
+              </a:lnSpc>
+              <a:spcAft>
+                <a:spcPts val="0"/>
+              </a:spcAft>
+              <a:buNone/>
+            </a:pPr>
+            <a:r>
+              <a:rPr lang="en-US" sz="1350" b="1">
+                <a:solidFill>
+                  <a:srgbClr val="EFB45F"/>
+                </a:solidFill>
+                <a:latin typeface="Arial"/>
+                <a:ea typeface="Arial"/>
+                <a:cs typeface="Arial"/>
+              </a:rPr>
+              <a:t xml:space="preserve">12 / 12    SOURCE SLIDE 17</a:t>
+            </a:r>
+            <a:endParaRPr lang="en-US" sz="1350"/>
+          </a:p>
+        </p:txBody>
+      </p:sp>
+      <p:sp>
+        <p:nvSpPr>
+          <p:cNvPr id="3" name="Text 3"/>
+          <p:cNvSpPr txBox="1"/>
+          <p:nvPr/>
+        </p:nvSpPr>
+        <p:spPr>
+          <a:xfrm>
+            <a:off x="685800" y="1057275"/>
+            <a:ext cx="12344400" cy="1381125"/>
+          </a:xfrm>
+          <a:prstGeom prst="rect">
+            <a:avLst/>
+          </a:prstGeom>
+          <a:noFill/>
+          <a:ln>
+            <a:noFill/>
+          </a:ln>
+        </p:spPr>
+        <p:txBody>
+          <a:bodyPr wrap="none" lIns="0" tIns="0" rIns="0" bIns="0" anchor="t">
+            <a:noAutofit/>
+          </a:bodyPr>
+          <a:lstStyle/>
+          <a:p>
+            <a:pPr marL="0" indent="0">
+              <a:lnSpc>
+                <a:spcPts val="4680"/>
+              </a:lnSpc>
+              <a:spcAft>
+                <a:spcPts val="0"/>
+              </a:spcAft>
+              <a:buNone/>
+            </a:pPr>
+            <a:r>
+              <a:rPr lang="en-US" sz="3900" b="1">
+                <a:solidFill>
+                  <a:srgbClr val="F5F1E9"/>
+                </a:solidFill>
+                <a:latin typeface="Arial"/>
+                <a:ea typeface="Arial"/>
+                <a:cs typeface="Arial"/>
+              </a:rPr>
+              <a:t xml:space="preserve">Break the mirror on purpose</a:t>
+            </a:r>
+            <a:endParaRPr lang="en-US" sz="3900"/>
+          </a:p>
+        </p:txBody>
+      </p:sp>
+      <p:sp>
+        <p:nvSpPr>
+          <p:cNvPr id="4" name="Text 4"/>
+          <p:cNvSpPr txBox="1"/>
+          <p:nvPr/>
+        </p:nvSpPr>
+        <p:spPr>
+          <a:xfrm>
+            <a:off x="685800" y="2771775"/>
+            <a:ext cx="904875" cy="476250"/>
+          </a:xfrm>
+          <a:prstGeom prst="rect">
+            <a:avLst/>
+          </a:prstGeom>
+          <a:noFill/>
+          <a:ln>
+            <a:noFill/>
+          </a:ln>
+        </p:spPr>
+        <p:txBody>
+          <a:bodyPr wrap="none" lIns="0" tIns="0" rIns="0" bIns="0" anchor="t">
+            <a:noAutofit/>
+          </a:bodyPr>
+          <a:lstStyle/>
+          <a:p>
+            <a:pPr marL="0" indent="0">
+              <a:lnSpc>
+                <a:spcPts val="2438"/>
+              </a:lnSpc>
+              <a:spcAft>
+                <a:spcPts val="0"/>
+              </a:spcAft>
+              <a:buNone/>
+            </a:pPr>
+            <a:r>
+              <a:rPr lang="en-US" sz="1875" b="0">
+                <a:solidFill>
+                  <a:srgbClr val="EFB45F"/>
+                </a:solidFill>
+                <a:latin typeface="Arial"/>
+                <a:ea typeface="Arial"/>
+                <a:cs typeface="Arial"/>
+              </a:rPr>
+              <a:t xml:space="preserve">01</a:t>
+            </a:r>
+            <a:endParaRPr lang="en-US" sz="1875"/>
+          </a:p>
+        </p:txBody>
+      </p:sp>
+      <p:sp>
+        <p:nvSpPr>
+          <p:cNvPr id="5" name="Text 5"/>
+          <p:cNvSpPr txBox="1"/>
+          <p:nvPr/>
+        </p:nvSpPr>
+        <p:spPr>
+          <a:xfrm>
+            <a:off x="2000250" y="2771775"/>
+            <a:ext cx="11029950" cy="539115"/>
+          </a:xfrm>
+          <a:prstGeom prst="rect">
+            <a:avLst/>
+          </a:prstGeom>
+          <a:noFill/>
+          <a:ln>
+            <a:noFill/>
+          </a:ln>
+        </p:spPr>
+        <p:txBody>
+          <a:bodyPr wrap="none" lIns="0" tIns="0" rIns="0" bIns="0" anchor="t">
+            <a:noAutofit/>
+          </a:bodyPr>
+          <a:lstStyle/>
+          <a:p>
+            <a:pPr marL="0" indent="0">
+              <a:lnSpc>
+                <a:spcPts val="4095"/>
+              </a:lnSpc>
+              <a:spcAft>
+                <a:spcPts val="0"/>
+              </a:spcAft>
+              <a:buNone/>
+            </a:pPr>
+            <a:r>
+              <a:rPr lang="en-US" sz="3150" b="0">
+                <a:solidFill>
+                  <a:srgbClr val="F5F1E9"/>
+                </a:solidFill>
+                <a:latin typeface="Arial"/>
+                <a:ea typeface="Arial"/>
+                <a:cs typeface="Arial"/>
+              </a:rPr>
+              <a:t xml:space="preserve">Reprice the handoffs. Draw the interfaces.</a:t>
+            </a:r>
+            <a:endParaRPr lang="en-US" sz="3150"/>
+          </a:p>
+        </p:txBody>
+      </p:sp>
+      <p:sp>
+        <p:nvSpPr>
+          <p:cNvPr id="6" name="Text 6"/>
+          <p:cNvSpPr txBox="1"/>
+          <p:nvPr/>
+        </p:nvSpPr>
+        <p:spPr>
+          <a:xfrm>
+            <a:off x="685800" y="3558540"/>
+            <a:ext cx="904875" cy="476250"/>
+          </a:xfrm>
+          <a:prstGeom prst="rect">
+            <a:avLst/>
+          </a:prstGeom>
+          <a:noFill/>
+          <a:ln>
+            <a:noFill/>
+          </a:ln>
+        </p:spPr>
+        <p:txBody>
+          <a:bodyPr wrap="none" lIns="0" tIns="0" rIns="0" bIns="0" anchor="t">
+            <a:noAutofit/>
+          </a:bodyPr>
+          <a:lstStyle/>
+          <a:p>
+            <a:pPr marL="0" indent="0">
+              <a:lnSpc>
+                <a:spcPts val="2438"/>
+              </a:lnSpc>
+              <a:spcAft>
+                <a:spcPts val="0"/>
+              </a:spcAft>
+              <a:buNone/>
+            </a:pPr>
+            <a:r>
+              <a:rPr lang="en-US" sz="1875" b="0">
+                <a:solidFill>
+                  <a:srgbClr val="EFB45F"/>
+                </a:solidFill>
+                <a:latin typeface="Arial"/>
+                <a:ea typeface="Arial"/>
+                <a:cs typeface="Arial"/>
+              </a:rPr>
+              <a:t xml:space="preserve">02</a:t>
+            </a:r>
+            <a:endParaRPr lang="en-US" sz="1875"/>
+          </a:p>
+        </p:txBody>
+      </p:sp>
+      <p:sp>
+        <p:nvSpPr>
+          <p:cNvPr id="7" name="Text 7"/>
+          <p:cNvSpPr txBox="1"/>
+          <p:nvPr/>
+        </p:nvSpPr>
+        <p:spPr>
+          <a:xfrm>
+            <a:off x="2000250" y="3558540"/>
             <a:ext cx="11029950" cy="539115"/>
           </a:xfrm>
           <a:prstGeom prst="rect">
@@ -7095,7 +8215,7 @@
                 <a:ea typeface="Arial"/>
                 <a:cs typeface="Arial"/>
               </a:rPr>
-              <a:t xml:space="preserve">11</a:t>
+              <a:t xml:space="preserve">12</a:t>
             </a:r>
             <a:endParaRPr lang="en-US" sz="975"/>
           </a:p>
@@ -7177,7 +8297,7 @@
                 <a:ea typeface="Arial"/>
                 <a:cs typeface="Arial"/>
               </a:rPr>
-              <a:t xml:space="preserve">02 / 11    SOURCE SLIDE 3</a:t>
+              <a:t xml:space="preserve">02 / 12    SOURCE SLIDE 3</a:t>
             </a:r>
             <a:endParaRPr lang="en-US" sz="1350"/>
           </a:p>
@@ -7602,7 +8722,7 @@
                 <a:ea typeface="Arial"/>
                 <a:cs typeface="Arial"/>
               </a:rPr>
-              <a:t xml:space="preserve">03 / 11    SOURCE SLIDE 4</a:t>
+              <a:t xml:space="preserve">03 / 12    SOURCE SLIDE 4</a:t>
             </a:r>
             <a:endParaRPr lang="en-US" sz="1350"/>
           </a:p>
@@ -8027,7 +9147,7 @@
                 <a:ea typeface="Arial"/>
                 <a:cs typeface="Arial"/>
               </a:rPr>
-              <a:t xml:space="preserve">04 / 11    SOURCE SLIDE 5</a:t>
+              <a:t xml:space="preserve">04 / 12    SOURCE SLIDE 5</a:t>
             </a:r>
             <a:endParaRPr lang="en-US" sz="1350"/>
           </a:p>
@@ -8311,7 +9431,7 @@
                 <a:ea typeface="Arial"/>
                 <a:cs typeface="Arial"/>
               </a:rPr>
-              <a:t xml:space="preserve">05 / 11    SOURCE SLIDE 6</a:t>
+              <a:t xml:space="preserve">05 / 12    SOURCE SLIDE 6</a:t>
             </a:r>
             <a:endParaRPr lang="en-US" sz="1350"/>
           </a:p>
@@ -8736,7 +9856,7 @@
                 <a:ea typeface="Arial"/>
                 <a:cs typeface="Arial"/>
               </a:rPr>
-              <a:t xml:space="preserve">06 / 11    SOURCE SLIDE 7</a:t>
+              <a:t xml:space="preserve">06 / 12    SOURCE SLIDE 7</a:t>
             </a:r>
             <a:endParaRPr lang="en-US" sz="1350"/>
           </a:p>
@@ -9161,7 +10281,7 @@
                 <a:ea typeface="Arial"/>
                 <a:cs typeface="Arial"/>
               </a:rPr>
-              <a:t xml:space="preserve">07 / 11    SOURCE SLIDE 9</a:t>
+              <a:t xml:space="preserve">07 / 12    SOURCE SLIDE 9</a:t>
             </a:r>
             <a:endParaRPr lang="en-US" sz="1350"/>
           </a:p>
@@ -9586,7 +10706,7 @@
                 <a:ea typeface="Arial"/>
                 <a:cs typeface="Arial"/>
               </a:rPr>
-              <a:t xml:space="preserve">08 / 11    SOURCE SLIDE 10</a:t>
+              <a:t xml:space="preserve">08 / 12    SOURCE SLIDE 10</a:t>
             </a:r>
             <a:endParaRPr lang="en-US" sz="1350"/>
           </a:p>
@@ -10011,7 +11131,7 @@
                 <a:ea typeface="Arial"/>
                 <a:cs typeface="Arial"/>
               </a:rPr>
-              <a:t xml:space="preserve">09 / 11    SOURCE SLIDE 11</a:t>
+              <a:t xml:space="preserve">09 / 12    SOURCE SLIDE 11</a:t>
             </a:r>
             <a:endParaRPr lang="en-US" sz="1350"/>
           </a:p>

--- a/artifacts/speaking-portfolio-expanded/decks/product-engineering-30min-screen.pptx
+++ b/artifacts/speaking-portfolio-expanded/decks/product-engineering-30min-screen.pptx
@@ -677,7 +677,7 @@
                 <a:ea typeface="Arial"/>
                 <a:cs typeface="Arial"/>
               </a:rPr>
-              <a:t xml:space="preserve">Source slide 12. 21:00 to 23:30</a:t>
+              <a:t xml:space="preserve">Source slide 12. 20:30 to 23:00</a:t>
             </a:r>
             <a:endParaRPr lang="en-US" sz="1200"/>
           </a:p>
@@ -1045,7 +1045,7 @@
                 <a:ea typeface="Arial"/>
                 <a:cs typeface="Arial"/>
               </a:rPr>
-              <a:t xml:space="preserve">Bridge: Graicunas counted 222 possible relationships at six reports, which is a warning about interfaces rather than a staffing ratio, and Bainbridge asks who still gets recovery practice. One more ownership line for the years ahead: tokens stop being a build cost and become fuel, defensive agents run forever, and somebody owns that meter.</a:t>
+              <a:t xml:space="preserve">Bridge: Graicunas counted 222 possible relationships at six reports, which is a warning about interfaces rather than a staffing ratio, and Bainbridge asks who still gets recovery practice. That leaves two predictions to close on, and I will label them as predictions once, because I have measured neither. The first is an ownership line for the years ahead: tokens stop being a build cost and become fuel, defensive agents run forever, and somebody owns that meter.</a:t>
             </a:r>
             <a:endParaRPr lang="en-US" sz="1200"/>
           </a:p>
@@ -1158,7 +1158,7 @@
                 <a:ea typeface="Arial"/>
                 <a:cs typeface="Arial"/>
               </a:rPr>
-              <a:t xml:space="preserve">Source slide 15. 23:30 to 26:30</a:t>
+              <a:t xml:space="preserve">Source slide 15. 23:00 to 27:00</a:t>
             </a:r>
             <a:endParaRPr lang="en-US" sz="1200"/>
           </a:p>
@@ -1343,52 +1343,6 @@
                 <a:cs typeface="Arial"/>
               </a:rPr>
               <a:t xml:space="preserve">Second prediction, and this one is less comfortable. AI does not magically make software work. Well-understood software still gets harder to operate as the world moves under it: you outgrow a performance envelope, you accumulate features, somebody deprecates your dependency. Generation makes the first version cheap. It does not make the tenth year cheap.</a:t>
-            </a:r>
-            <a:endParaRPr lang="en-US" sz="1200"/>
-          </a:p>
-          <a:p>
-            <a:pPr marL="0" indent="0">
-              <a:lnSpc>
-                <a:spcPts val="1560"/>
-              </a:lnSpc>
-              <a:spcAft>
-                <a:spcPts val="0"/>
-              </a:spcAft>
-              <a:buNone/>
-            </a:pPr>
-            <a:r>
-              <a:rPr lang="en-US" sz="1200" b="0">
-                <a:solidFill>
-                  <a:srgbClr val="202b33"/>
-                </a:solidFill>
-                <a:latin typeface="Arial"/>
-                <a:ea typeface="Arial"/>
-                <a:cs typeface="Arial"/>
-              </a:rPr>
-              <a:t xml:space="preserve"/>
-            </a:r>
-            <a:endParaRPr lang="en-US" sz="1200"/>
-          </a:p>
-          <a:p>
-            <a:pPr marL="0" indent="0">
-              <a:lnSpc>
-                <a:spcPts val="1560"/>
-              </a:lnSpc>
-              <a:spcAft>
-                <a:spcPts val="0"/>
-              </a:spcAft>
-              <a:buNone/>
-            </a:pPr>
-            <a:r>
-              <a:rPr lang="en-US" sz="1200" b="0">
-                <a:solidFill>
-                  <a:srgbClr val="202b33"/>
-                </a:solidFill>
-                <a:latin typeface="Arial"/>
-                <a:ea typeface="Arial"/>
-                <a:cs typeface="Arial"/>
-              </a:rPr>
-              <a:t xml:space="preserve">And throwaway software is a taste most of this room has and most of the world does not. We are early adopters; we are delighted to regenerate a tool rather than maintain it. Normal people are not turned on by the idea of vibe coding their own recipe tracker, never mind a Slack replacement. What they will accept is an interface generated for them, adapting in real time, that they never had to choose from a menu of products.</a:t>
             </a:r>
             <a:endParaRPr lang="en-US" sz="1200"/>
           </a:p>
@@ -1777,7 +1731,7 @@
                 <a:ea typeface="Arial"/>
                 <a:cs typeface="Arial"/>
               </a:rPr>
-              <a:t xml:space="preserve">Source slide 17. 26:30 to 30:00</a:t>
+              <a:t xml:space="preserve">Source slide 17. 27:00 to 30:00</a:t>
             </a:r>
             <a:endParaRPr lang="en-US" sz="1200"/>
           </a:p>
@@ -5809,7 +5763,7 @@
                 <a:ea typeface="Arial"/>
                 <a:cs typeface="Arial"/>
               </a:rPr>
-              <a:t xml:space="preserve">Source slide 11. 16:30 to 21:00</a:t>
+              <a:t xml:space="preserve">Source slide 11. 16:30 to 20:30</a:t>
             </a:r>
             <a:endParaRPr lang="en-US" sz="1200"/>
           </a:p>
@@ -7383,324 +7337,62 @@
       </p:sp>
       <p:sp>
         <p:nvSpPr>
-          <p:cNvPr id="4" name="Text 4"/>
-          <p:cNvSpPr txBox="1"/>
+          <p:cNvPr id="4" name="Image background"/>
+          <p:cNvSpPr/>
           <p:nvPr/>
         </p:nvSpPr>
         <p:spPr>
           <a:xfrm>
-            <a:off x="685800" y="2771775"/>
-            <a:ext cx="904875" cy="476250"/>
+            <a:off x="944880" y="2647950"/>
+            <a:ext cx="11826240" cy="4619625"/>
           </a:xfrm>
           <a:prstGeom prst="rect">
             <a:avLst/>
           </a:prstGeom>
-          <a:noFill/>
+          <a:solidFill>
+            <a:srgbClr val="161D26"/>
+          </a:solidFill>
           <a:ln>
             <a:noFill/>
           </a:ln>
         </p:spPr>
-        <p:txBody>
-          <a:bodyPr wrap="none" lIns="0" tIns="0" rIns="0" bIns="0" anchor="t">
-            <a:noAutofit/>
-          </a:bodyPr>
-          <a:lstStyle/>
-          <a:p>
-            <a:pPr marL="0" indent="0">
-              <a:lnSpc>
-                <a:spcPts val="2438"/>
-              </a:lnSpc>
-              <a:spcAft>
-                <a:spcPts val="0"/>
-              </a:spcAft>
-              <a:buNone/>
-            </a:pPr>
-            <a:r>
-              <a:rPr lang="en-US" sz="1875" b="0">
-                <a:solidFill>
-                  <a:srgbClr val="EFB45F"/>
-                </a:solidFill>
-                <a:latin typeface="Arial"/>
-                <a:ea typeface="Arial"/>
-                <a:cs typeface="Arial"/>
-              </a:rPr>
-              <a:t xml:space="preserve">01</a:t>
-            </a:r>
-            <a:endParaRPr lang="en-US" sz="1875"/>
-          </a:p>
-        </p:txBody>
       </p:sp>
-      <p:sp>
-        <p:nvSpPr>
-          <p:cNvPr id="5" name="Text 5"/>
-          <p:cNvSpPr txBox="1"/>
+      <p:pic>
+        <p:nvPicPr>
+          <p:cNvPr id="5" name="f1622316a6930645ce2701de05e30b019086ac9401bd06917acb71f400ca25e3" descr="Prediction: a grid of chosen apps gives way to one generated surface, adapting per person, with a revived terminal beside it. Who owns that channel is still open, and non-frontier builders can rethink any app as AI-native."/>
+          <p:cNvPicPr>
+            <a:picLocks noChangeAspect="1"/>
+          </p:cNvPicPr>
           <p:nvPr/>
-        </p:nvSpPr>
+        </p:nvPicPr>
+        <p:blipFill>
+          <a:blip r:embed="rIdImage1">
+            <a:extLst>
+              <a:ext uri="{96DAC541-7B7A-43D3-8B79-37D633B846F1}">
+                <asvg:svgBlip xmlns:asvg="http://schemas.microsoft.com/office/drawing/2016/SVG/main" r:embed="rIdSvg1"/>
+              </a:ext>
+            </a:extLst>
+          </a:blip>
+          <a:stretch>
+            <a:fillRect/>
+          </a:stretch>
+        </p:blipFill>
         <p:spPr>
           <a:xfrm>
-            <a:off x="2000250" y="2771775"/>
-            <a:ext cx="11029950" cy="539115"/>
+            <a:off x="944880" y="2647950"/>
+            <a:ext cx="11826240" cy="4619625"/>
           </a:xfrm>
           <a:prstGeom prst="rect">
             <a:avLst/>
           </a:prstGeom>
-          <a:noFill/>
           <a:ln>
             <a:noFill/>
           </a:ln>
         </p:spPr>
-        <p:txBody>
-          <a:bodyPr wrap="none" lIns="0" tIns="0" rIns="0" bIns="0" anchor="t">
-            <a:noAutofit/>
-          </a:bodyPr>
-          <a:lstStyle/>
-          <a:p>
-            <a:pPr marL="0" indent="0">
-              <a:lnSpc>
-                <a:spcPts val="4095"/>
-              </a:lnSpc>
-              <a:spcAft>
-                <a:spcPts val="0"/>
-              </a:spcAft>
-              <a:buNone/>
-            </a:pPr>
-            <a:r>
-              <a:rPr lang="en-US" sz="3150" b="0">
-                <a:solidFill>
-                  <a:srgbClr val="F5F1E9"/>
-                </a:solidFill>
-                <a:latin typeface="Arial"/>
-                <a:ea typeface="Arial"/>
-                <a:cs typeface="Arial"/>
-              </a:rPr>
-              <a:t xml:space="preserve">Generated UI, adapting in real time, per person</a:t>
-            </a:r>
-            <a:endParaRPr lang="en-US" sz="3150"/>
-          </a:p>
-        </p:txBody>
-      </p:sp>
+      </p:pic>
       <p:sp>
         <p:nvSpPr>
           <p:cNvPr id="6" name="Text 6"/>
-          <p:cNvSpPr txBox="1"/>
-          <p:nvPr/>
-        </p:nvSpPr>
-        <p:spPr>
-          <a:xfrm>
-            <a:off x="685800" y="3558540"/>
-            <a:ext cx="904875" cy="476250"/>
-          </a:xfrm>
-          <a:prstGeom prst="rect">
-            <a:avLst/>
-          </a:prstGeom>
-          <a:noFill/>
-          <a:ln>
-            <a:noFill/>
-          </a:ln>
-        </p:spPr>
-        <p:txBody>
-          <a:bodyPr wrap="none" lIns="0" tIns="0" rIns="0" bIns="0" anchor="t">
-            <a:noAutofit/>
-          </a:bodyPr>
-          <a:lstStyle/>
-          <a:p>
-            <a:pPr marL="0" indent="0">
-              <a:lnSpc>
-                <a:spcPts val="2438"/>
-              </a:lnSpc>
-              <a:spcAft>
-                <a:spcPts val="0"/>
-              </a:spcAft>
-              <a:buNone/>
-            </a:pPr>
-            <a:r>
-              <a:rPr lang="en-US" sz="1875" b="0">
-                <a:solidFill>
-                  <a:srgbClr val="EFB45F"/>
-                </a:solidFill>
-                <a:latin typeface="Arial"/>
-                <a:ea typeface="Arial"/>
-                <a:cs typeface="Arial"/>
-              </a:rPr>
-              <a:t xml:space="preserve">02</a:t>
-            </a:r>
-            <a:endParaRPr lang="en-US" sz="1875"/>
-          </a:p>
-        </p:txBody>
-      </p:sp>
-      <p:sp>
-        <p:nvSpPr>
-          <p:cNvPr id="7" name="Text 7"/>
-          <p:cNvSpPr txBox="1"/>
-          <p:nvPr/>
-        </p:nvSpPr>
-        <p:spPr>
-          <a:xfrm>
-            <a:off x="2000250" y="3558540"/>
-            <a:ext cx="11029950" cy="1059180"/>
-          </a:xfrm>
-          <a:prstGeom prst="rect">
-            <a:avLst/>
-          </a:prstGeom>
-          <a:noFill/>
-          <a:ln>
-            <a:noFill/>
-          </a:ln>
-        </p:spPr>
-        <p:txBody>
-          <a:bodyPr wrap="none" lIns="0" tIns="0" rIns="0" bIns="0" anchor="t">
-            <a:noAutofit/>
-          </a:bodyPr>
-          <a:lstStyle/>
-          <a:p>
-            <a:pPr marL="0" indent="0">
-              <a:lnSpc>
-                <a:spcPts val="4095"/>
-              </a:lnSpc>
-              <a:spcAft>
-                <a:spcPts val="0"/>
-              </a:spcAft>
-              <a:buNone/>
-            </a:pPr>
-            <a:r>
-              <a:rPr lang="en-US" sz="3150" b="0">
-                <a:solidFill>
-                  <a:srgbClr val="F5F1E9"/>
-                </a:solidFill>
-                <a:latin typeface="Arial"/>
-                <a:ea typeface="Arial"/>
-                <a:cs typeface="Arial"/>
-              </a:rPr>
-              <a:t xml:space="preserve">Yes, the software you mastered is going away. As you</a:t>
-            </a:r>
-            <a:endParaRPr lang="en-US" sz="3150"/>
-          </a:p>
-          <a:p>
-            <a:pPr marL="0" indent="0">
-              <a:lnSpc>
-                <a:spcPts val="4095"/>
-              </a:lnSpc>
-              <a:spcAft>
-                <a:spcPts val="0"/>
-              </a:spcAft>
-              <a:buNone/>
-            </a:pPr>
-            <a:r>
-              <a:rPr lang="en-US" sz="3150" b="0">
-                <a:solidFill>
-                  <a:srgbClr val="F5F1E9"/>
-                </a:solidFill>
-                <a:latin typeface="Arial"/>
-                <a:ea typeface="Arial"/>
-                <a:cs typeface="Arial"/>
-              </a:rPr>
-              <a:t xml:space="preserve">know it.</a:t>
-            </a:r>
-            <a:endParaRPr lang="en-US" sz="3150"/>
-          </a:p>
-        </p:txBody>
-      </p:sp>
-      <p:sp>
-        <p:nvSpPr>
-          <p:cNvPr id="8" name="Text 8"/>
-          <p:cNvSpPr txBox="1"/>
-          <p:nvPr/>
-        </p:nvSpPr>
-        <p:spPr>
-          <a:xfrm>
-            <a:off x="685800" y="4865370"/>
-            <a:ext cx="904875" cy="476250"/>
-          </a:xfrm>
-          <a:prstGeom prst="rect">
-            <a:avLst/>
-          </a:prstGeom>
-          <a:noFill/>
-          <a:ln>
-            <a:noFill/>
-          </a:ln>
-        </p:spPr>
-        <p:txBody>
-          <a:bodyPr wrap="none" lIns="0" tIns="0" rIns="0" bIns="0" anchor="t">
-            <a:noAutofit/>
-          </a:bodyPr>
-          <a:lstStyle/>
-          <a:p>
-            <a:pPr marL="0" indent="0">
-              <a:lnSpc>
-                <a:spcPts val="2438"/>
-              </a:lnSpc>
-              <a:spcAft>
-                <a:spcPts val="0"/>
-              </a:spcAft>
-              <a:buNone/>
-            </a:pPr>
-            <a:r>
-              <a:rPr lang="en-US" sz="1875" b="0">
-                <a:solidFill>
-                  <a:srgbClr val="EFB45F"/>
-                </a:solidFill>
-                <a:latin typeface="Arial"/>
-                <a:ea typeface="Arial"/>
-                <a:cs typeface="Arial"/>
-              </a:rPr>
-              <a:t xml:space="preserve">03</a:t>
-            </a:r>
-            <a:endParaRPr lang="en-US" sz="1875"/>
-          </a:p>
-        </p:txBody>
-      </p:sp>
-      <p:sp>
-        <p:nvSpPr>
-          <p:cNvPr id="9" name="Text 9"/>
-          <p:cNvSpPr txBox="1"/>
-          <p:nvPr/>
-        </p:nvSpPr>
-        <p:spPr>
-          <a:xfrm>
-            <a:off x="2000250" y="4865370"/>
-            <a:ext cx="11029950" cy="539115"/>
-          </a:xfrm>
-          <a:prstGeom prst="rect">
-            <a:avLst/>
-          </a:prstGeom>
-          <a:noFill/>
-          <a:ln>
-            <a:noFill/>
-          </a:ln>
-        </p:spPr>
-        <p:txBody>
-          <a:bodyPr wrap="none" lIns="0" tIns="0" rIns="0" bIns="0" anchor="t">
-            <a:noAutofit/>
-          </a:bodyPr>
-          <a:lstStyle/>
-          <a:p>
-            <a:pPr marL="0" indent="0">
-              <a:lnSpc>
-                <a:spcPts val="4095"/>
-              </a:lnSpc>
-              <a:spcAft>
-                <a:spcPts val="0"/>
-              </a:spcAft>
-              <a:buNone/>
-            </a:pPr>
-            <a:r>
-              <a:rPr lang="en-US" sz="3150" b="0">
-                <a:solidFill>
-                  <a:srgbClr val="F5F1E9"/>
-                </a:solidFill>
-                <a:latin typeface="Arial"/>
-                <a:ea typeface="Arial"/>
-                <a:cs typeface="Arial"/>
-              </a:rPr>
-              <a:t xml:space="preserve">The channel is not spoken for.</a:t>
-            </a:r>
-            <a:endParaRPr lang="en-US" sz="3150"/>
-          </a:p>
-        </p:txBody>
-      </p:sp>
-      <p:sp>
-        <p:nvSpPr>
-          <p:cNvPr id="10" name="Text 10"/>
           <p:cNvSpPr txBox="1"/>
           <p:nvPr/>
         </p:nvSpPr>
@@ -7749,7 +7441,7 @@
       </p:sp>
       <p:sp>
         <p:nvSpPr>
-          <p:cNvPr id="11" name="Text 11"/>
+          <p:cNvPr id="7" name="Text 7"/>
           <p:cNvSpPr txBox="1"/>
           <p:nvPr/>
         </p:nvSpPr>

--- a/artifacts/speaking-portfolio-expanded/decks/product-engineering-30min-screen.pptx
+++ b/artifacts/speaking-portfolio-expanded/decks/product-engineering-30min-screen.pptx
@@ -1388,7 +1388,7 @@
                 <a:ea typeface="Arial"/>
                 <a:cs typeface="Arial"/>
               </a:rPr>
-              <a:t xml:space="preserve">Which raises the question this room should actually be arguing about. Should OpenAI and Anthropic end up owning every software channel? Watch what happens when the assistants ship real-time collaboration: who spends less time in email, Slack and Google Docs then? I can already make and edit images and video in ways that make me less likely to open Photoshop or DaVinci. If I need a jingle for the company, I ask Suno and it is done. So is everything you spent a lifetime learning, mastering and fighting with about to be irrelevant? Yes. At least as you know it.</a:t>
+              <a:t xml:space="preserve">Which raises the question this room should be arguing about. Should OpenAI and Anthropic end up owning every software channel? Watch what happens when the assistants ship real-time collaboration: who spends less time in email, Slack and Docs then? I can already edit images and video in ways that make me less likely to open Photoshop or DaVinci, and if I need a jingle I ask Suno and it is done. So is everything you spent a lifetime mastering about to be irrelevant? Yes. At least as you know it.</a:t>
             </a:r>
             <a:endParaRPr lang="en-US" sz="1200"/>
           </a:p>
@@ -1480,7 +1480,7 @@
                 <a:ea typeface="Arial"/>
                 <a:cs typeface="Arial"/>
               </a:rPr>
-              <a:t xml:space="preserve">Here is the part I want you to leave with. That future is not spoken for. GPT image being pretty good does not mean the story of image creation belongs to the big players, and the same is true in whichever industry you work in. Those of us who do not work at a frontier lab, the organic agents in the room, get to rethink any and every app as an AI-native system from the boundary up. That is this whole talk one level higher: do not photocopy today's product categories onto tomorrow's substrate either.</a:t>
+              <a:t xml:space="preserve">Here is the part I want you to leave with. That future is not spoken for. GPT image being pretty good does not mean image creation belongs to the big players, and the same holds in whichever industry you work in. Those of us who do not work at a frontier lab — the organic agents in the room — get to rethink any and every app as an AI-native system, from the boundary up. That is this whole talk one level higher: do not photocopy today's product categories onto tomorrow's substrate either.</a:t>
             </a:r>
             <a:endParaRPr lang="en-US" sz="1200"/>
           </a:p>
